--- a/BEMS_Presentation_EN.pptx
+++ b/BEMS_Presentation_EN.pptx
@@ -3722,7 +3722,7 @@
                 <a:ea typeface="Segoe UI" pitchFamily="34" charset="-122"/>
                 <a:cs typeface="Segoe UI" pitchFamily="34" charset="-120"/>
               </a:rPr>
-              <a:t>Severity · zone 필터 · Diagnose/권고/증거 컬럼 · CSV 내보내기</a:t>
+              <a:t>Severity · zone filters · diagnosis/action/evidence columns · CSV export</a:t>
             </a:r>
             <a:endParaRPr lang="en-US" sz="1100" dirty="0"/>
           </a:p>
@@ -10978,7 +10978,7 @@
                 <a:ea typeface="Segoe UI" pitchFamily="34" charset="-122"/>
                 <a:cs typeface="Segoe UI" pitchFamily="34" charset="-120"/>
               </a:rPr>
-              <a:t>What You Can Do With It</a:t>
+              <a:t>What the system can do</a:t>
             </a:r>
             <a:endParaRPr lang="en-US" sz="3000" dirty="0"/>
           </a:p>
@@ -11351,7 +11351,7 @@
                 <a:ea typeface="Segoe UI" pitchFamily="34" charset="-122"/>
                 <a:cs typeface="Segoe UI" pitchFamily="34" charset="-120"/>
               </a:rPr>
-              <a:t>Packet Loss Recover</a:t>
+              <a:t>Packet-loss recovery</a:t>
             </a:r>
             <a:endParaRPr lang="en-US" sz="1300" dirty="0"/>
           </a:p>
@@ -11525,7 +11525,7 @@
                 <a:ea typeface="Segoe UI" pitchFamily="34" charset="-122"/>
                 <a:cs typeface="Segoe UI" pitchFamily="34" charset="-120"/>
               </a:rPr>
-              <a:t>다중 Detect기 비교</a:t>
+              <a:t>Multi-detector comparison</a:t>
             </a:r>
             <a:endParaRPr lang="en-US" sz="1300" dirty="0"/>
           </a:p>
@@ -11738,7 +11738,7 @@
                 <a:ea typeface="Segoe UI" pitchFamily="34" charset="-122"/>
                 <a:cs typeface="Segoe UI" pitchFamily="34" charset="-120"/>
               </a:rPr>
-              <a:t>9개 룰을 매칭하여 어떤 유형의 사고인지 Diagnose + 권고 조치 출력</a:t>
+              <a:t>Match 9 rules to diagnose the event type and output a recommended action</a:t>
             </a:r>
             <a:endParaRPr lang="en-US" sz="1050" dirty="0"/>
           </a:p>
@@ -11873,7 +11873,7 @@
                 <a:ea typeface="Segoe UI" pitchFamily="34" charset="-122"/>
                 <a:cs typeface="Segoe UI" pitchFamily="34" charset="-120"/>
               </a:rPr>
-              <a:t>시나리오 주입 Testing</a:t>
+              <a:t>Scenario injection testing</a:t>
             </a:r>
             <a:endParaRPr lang="en-US" sz="1300" dirty="0"/>
           </a:p>
@@ -12260,7 +12260,7 @@
                 <a:ea typeface="Segoe UI" pitchFamily="34" charset="-122"/>
                 <a:cs typeface="Segoe UI" pitchFamily="34" charset="-120"/>
               </a:rPr>
-              <a:t>필터링한 알림 목록을 CSV로 다운로드 (Operate 보고서 생성)</a:t>
+              <a:t>Download the filtered alert list as CSV (operations report)</a:t>
             </a:r>
             <a:endParaRPr lang="en-US" sz="1050" dirty="0"/>
           </a:p>
@@ -12395,7 +12395,7 @@
                 <a:ea typeface="Segoe UI" pitchFamily="34" charset="-122"/>
                 <a:cs typeface="Segoe UI" pitchFamily="34" charset="-120"/>
               </a:rPr>
-              <a:t>데이터 Persistence 및 리셋</a:t>
+              <a:t>Data persistence &amp; reset</a:t>
             </a:r>
             <a:endParaRPr lang="en-US" sz="1300" dirty="0"/>
           </a:p>
@@ -12853,7 +12853,7 @@
                 <a:ea typeface="Segoe UI" pitchFamily="34" charset="-122"/>
                 <a:cs typeface="Segoe UI" pitchFamily="34" charset="-120"/>
               </a:rPr>
-              <a:t>Six-Stage Agent Pipeline — 모두 독립 프로세스로 분리</a:t>
+              <a:t>Six-stage agent pipeline — every stage an independent process</a:t>
             </a:r>
             <a:endParaRPr lang="en-US" sz="1100" dirty="0"/>
           </a:p>
@@ -12931,7 +12931,7 @@
                 <a:ea typeface="Segoe UI" pitchFamily="34" charset="-122"/>
                 <a:cs typeface="Segoe UI" pitchFamily="34" charset="-120"/>
               </a:rPr>
-              <a:t>10% Packet Loss + 0.2–1.5s 지연 환경에서 시계열 무결성 유지</a:t>
+              <a:t>Keeps the series intact under 10% packet loss + 0.2–1.5 s delay</a:t>
             </a:r>
             <a:endParaRPr lang="en-US" sz="1100" dirty="0"/>
           </a:p>
@@ -13087,7 +13087,7 @@
                 <a:ea typeface="Segoe UI" pitchFamily="34" charset="-122"/>
                 <a:cs typeface="Segoe UI" pitchFamily="34" charset="-120"/>
               </a:rPr>
-              <a:t>9개 룰 엔진으로 결정론적·감사 가능한 Diagnose (블랙박스 X)</a:t>
+              <a:t>9-rule engine — deterministic, auditable diagnosis (no black box)</a:t>
             </a:r>
             <a:endParaRPr lang="en-US" sz="1100" dirty="0"/>
           </a:p>
@@ -13165,7 +13165,7 @@
                 <a:ea typeface="Segoe UI" pitchFamily="34" charset="-122"/>
                 <a:cs typeface="Segoe UI" pitchFamily="34" charset="-120"/>
               </a:rPr>
-              <a:t>엔터프라이즈 톤의 6탭 Operate 콘솔</a:t>
+              <a:t>Enterprise-style 6-tab operations console</a:t>
             </a:r>
             <a:endParaRPr lang="en-US" sz="1100" dirty="0"/>
           </a:p>
@@ -13243,7 +13243,7 @@
                 <a:ea typeface="Segoe UI" pitchFamily="34" charset="-122"/>
                 <a:cs typeface="Segoe UI" pitchFamily="34" charset="-120"/>
               </a:rPr>
-              <a:t>Pytest 24개 — 데드락 회귀 Testing 포함</a:t>
+              <a:t>24 pytest cases — including a deadlock regression test</a:t>
             </a:r>
             <a:endParaRPr lang="en-US" sz="1100" dirty="0"/>
           </a:p>
@@ -15789,7 +15789,7 @@
                 <a:ea typeface="Segoe UI" pitchFamily="34" charset="-122"/>
                 <a:cs typeface="Segoe UI" pitchFamily="34" charset="-120"/>
               </a:rPr>
-              <a:t>What You Can Do With It</a:t>
+              <a:t>What the system can do</a:t>
             </a:r>
             <a:endParaRPr lang="en-US" sz="1000" dirty="0"/>
           </a:p>
@@ -16971,7 +16971,7 @@
                 <a:ea typeface="Segoe UI" pitchFamily="34" charset="-122"/>
                 <a:cs typeface="Segoe UI" pitchFamily="34" charset="-120"/>
               </a:rPr>
-              <a:t>Six-Stage Agent Pipeline — 실제 Network degradation를 의도적으로 주입하고, ML로 Recover하고, 룰 엔진으로 Diagnose합니다.</a:t>
+              <a:t>A six-stage agent pipeline — deliberately inject network degradation, recover with ML, diagnose with a rule engine.</a:t>
             </a:r>
             <a:endParaRPr lang="en-US" sz="1200" dirty="0"/>
           </a:p>
@@ -17439,7 +17439,7 @@
                 <a:ea typeface="Segoe UI" pitchFamily="34" charset="-122"/>
                 <a:cs typeface="Segoe UI" pitchFamily="34" charset="-120"/>
               </a:rPr>
-              <a:t>Streamlit 콘솔 — 6탭 Operate 화면과 시나리오 주입 기능</a:t>
+              <a:t>Streamlit console — 6-tab operations view with scenario injection</a:t>
             </a:r>
             <a:endParaRPr lang="en-US" sz="1000" dirty="0"/>
           </a:p>
@@ -18487,7 +18487,7 @@
                 <a:ea typeface="Segoe UI" pitchFamily="34" charset="-122"/>
                 <a:cs typeface="Segoe UI" pitchFamily="34" charset="-120"/>
               </a:rPr>
-              <a:t>보간 + 이상 Detect</a:t>
+              <a:t>Interpolate + detect</a:t>
             </a:r>
             <a:endParaRPr lang="en-US" sz="1000" dirty="0"/>
           </a:p>
@@ -18686,7 +18686,7 @@
                 <a:ea typeface="Segoe UI" pitchFamily="34" charset="-122"/>
                 <a:cs typeface="Segoe UI" pitchFamily="34" charset="-120"/>
               </a:rPr>
-              <a:t>룰 엔진 Diagnose</a:t>
+              <a:t>Rule-engine diagnosis</a:t>
             </a:r>
             <a:endParaRPr lang="en-US" sz="1000" dirty="0"/>
           </a:p>
@@ -18885,7 +18885,7 @@
                 <a:ea typeface="Segoe UI" pitchFamily="34" charset="-122"/>
                 <a:cs typeface="Segoe UI" pitchFamily="34" charset="-120"/>
               </a:rPr>
-              <a:t>Operate 콘솔</a:t>
+              <a:t>Operations console</a:t>
             </a:r>
             <a:endParaRPr lang="en-US" sz="1000" dirty="0"/>
           </a:p>
@@ -24597,7 +24597,7 @@
                 <a:ea typeface="Segoe UI" pitchFamily="34" charset="-122"/>
                 <a:cs typeface="Segoe UI" pitchFamily="34" charset="-120"/>
               </a:rPr>
-              <a:t>Operate 저장소 초기화</a:t>
+              <a:t>Reset the operational store</a:t>
             </a:r>
             <a:endParaRPr lang="en-US" sz="1000" dirty="0"/>
           </a:p>
@@ -24881,7 +24881,7 @@
                 <a:ea typeface="Segoe UI" pitchFamily="34" charset="-122"/>
                 <a:cs typeface="Segoe UI" pitchFamily="34" charset="-120"/>
               </a:rPr>
-              <a:t>ML Recover + 이상 플래그 프레임</a:t>
+              <a:t>ML-recovered + anomaly-flagged frame</a:t>
             </a:r>
             <a:endParaRPr lang="en-US" sz="1000" dirty="0"/>
           </a:p>
@@ -25307,7 +25307,7 @@
                 <a:ea typeface="Segoe UI" pitchFamily="34" charset="-122"/>
                 <a:cs typeface="Segoe UI" pitchFamily="34" charset="-120"/>
               </a:rPr>
-              <a:t>보간 MAE + Detect P/R/F1</a:t>
+              <a:t>Interpolation MAE + detection P/R/F1</a:t>
             </a:r>
             <a:endParaRPr lang="en-US" sz="1000" dirty="0"/>
           </a:p>

--- a/BEMS_Presentation_EN.pptx
+++ b/BEMS_Presentation_EN.pptx
@@ -3001,7 +3001,7 @@
                 <a:ea typeface="Segoe UI" pitchFamily="34" charset="-122"/>
                 <a:cs typeface="Segoe UI" pitchFamily="34" charset="-120"/>
               </a:rPr>
-              <a:t>A six-tab Streamlit console that visualizes live data and accepts user input.</a:t>
+              <a:t>A seven-tab Streamlit console that visualizes live data and accepts user input.</a:t>
             </a:r>
             <a:endParaRPr lang="en-US" sz="1400" dirty="0"/>
           </a:p>
@@ -3041,7 +3041,7 @@
         <p:spPr>
           <a:xfrm>
             <a:off x="502920" y="2103120"/>
-            <a:ext cx="3596640" cy="1920240"/>
+            <a:ext cx="2583180" cy="1828800"/>
           </a:xfrm>
           <a:prstGeom prst="rect">
             <a:avLst/>
@@ -3073,13 +3073,13 @@
         <p:spPr>
           <a:xfrm>
             <a:off x="502920" y="2103120"/>
-            <a:ext cx="3596640" cy="502920"/>
+            <a:ext cx="2583180" cy="502920"/>
           </a:xfrm>
           <a:prstGeom prst="rect">
             <a:avLst/>
           </a:prstGeom>
           <a:solidFill>
-            <a:srgbClr val="E8F0FF"/>
+            <a:srgbClr val="EDE7FF"/>
           </a:solidFill>
           <a:ln w="12700">
             <a:solidFill>
@@ -3116,7 +3116,7 @@
             <a:r>
               <a:rPr lang="en-US" sz="1100" b="1" dirty="0">
                 <a:solidFill>
-                  <a:srgbClr val="1F5DDE"/>
+                  <a:srgbClr val="6A4CFF"/>
                 </a:solidFill>
                 <a:latin typeface="Consolas" pitchFamily="34" charset="0"/>
                 <a:ea typeface="Consolas" pitchFamily="34" charset="-122"/>
@@ -3137,7 +3137,7 @@
         <p:spPr>
           <a:xfrm>
             <a:off x="1143000" y="2194560"/>
-            <a:ext cx="2773680" cy="329184"/>
+            <a:ext cx="1760220" cy="329184"/>
           </a:xfrm>
           <a:prstGeom prst="rect">
             <a:avLst/>
@@ -3161,7 +3161,7 @@
                 <a:ea typeface="Segoe UI" pitchFamily="34" charset="-122"/>
                 <a:cs typeface="Segoe UI" pitchFamily="34" charset="-120"/>
               </a:rPr>
-              <a:t>Operations</a:t>
+              <a:t>Building</a:t>
             </a:r>
             <a:endParaRPr lang="en-US" sz="1500" dirty="0"/>
           </a:p>
@@ -3176,7 +3176,7 @@
         <p:spPr>
           <a:xfrm>
             <a:off x="731520" y="2788920"/>
-            <a:ext cx="3185160" cy="1143000"/>
+            <a:ext cx="2171700" cy="1051560"/>
           </a:xfrm>
           <a:prstGeom prst="rect">
             <a:avLst/>
@@ -3200,7 +3200,7 @@
                 <a:ea typeface="Segoe UI" pitchFamily="34" charset="-122"/>
                 <a:cs typeface="Segoe UI" pitchFamily="34" charset="-120"/>
               </a:rPr>
-              <a:t>System health board · 6 service states · decision timeline · per-zone cards</a:t>
+              <a:t>Live floor-plan view · zones glow by severity · drill-down sensor charts · quick fault inject</a:t>
             </a:r>
             <a:endParaRPr lang="en-US" sz="1100" dirty="0"/>
           </a:p>
@@ -3214,8 +3214,8 @@
         </p:nvSpPr>
         <p:spPr>
           <a:xfrm>
-            <a:off x="4282440" y="2103120"/>
-            <a:ext cx="3596640" cy="1920240"/>
+            <a:off x="3360420" y="2103120"/>
+            <a:ext cx="2583180" cy="1828800"/>
           </a:xfrm>
           <a:prstGeom prst="rect">
             <a:avLst/>
@@ -3246,8 +3246,8 @@
         </p:nvSpPr>
         <p:spPr>
           <a:xfrm>
-            <a:off x="4282440" y="2103120"/>
-            <a:ext cx="3596640" cy="502920"/>
+            <a:off x="3360420" y="2103120"/>
+            <a:ext cx="2583180" cy="502920"/>
           </a:xfrm>
           <a:prstGeom prst="rect">
             <a:avLst/>
@@ -3271,7 +3271,7 @@
         </p:nvSpPr>
         <p:spPr>
           <a:xfrm>
-            <a:off x="4465320" y="2212848"/>
+            <a:off x="3543300" y="2212848"/>
             <a:ext cx="548640" cy="292608"/>
           </a:xfrm>
           <a:prstGeom prst="rect">
@@ -3310,8 +3310,8 @@
         </p:nvSpPr>
         <p:spPr>
           <a:xfrm>
-            <a:off x="4922520" y="2194560"/>
-            <a:ext cx="2773680" cy="329184"/>
+            <a:off x="4000500" y="2194560"/>
+            <a:ext cx="1760220" cy="329184"/>
           </a:xfrm>
           <a:prstGeom prst="rect">
             <a:avLst/>
@@ -3335,7 +3335,7 @@
                 <a:ea typeface="Segoe UI" pitchFamily="34" charset="-122"/>
                 <a:cs typeface="Segoe UI" pitchFamily="34" charset="-120"/>
               </a:rPr>
-              <a:t>Telemetry</a:t>
+              <a:t>Operations</a:t>
             </a:r>
             <a:endParaRPr lang="en-US" sz="1500" dirty="0"/>
           </a:p>
@@ -3349,8 +3349,8 @@
         </p:nvSpPr>
         <p:spPr>
           <a:xfrm>
-            <a:off x="4511040" y="2788920"/>
-            <a:ext cx="3185160" cy="1143000"/>
+            <a:off x="3589020" y="2788920"/>
+            <a:ext cx="2171700" cy="1051560"/>
           </a:xfrm>
           <a:prstGeom prst="rect">
             <a:avLst/>
@@ -3374,7 +3374,7 @@
                 <a:ea typeface="Segoe UI" pitchFamily="34" charset="-122"/>
                 <a:cs typeface="Segoe UI" pitchFamily="34" charset="-120"/>
               </a:rPr>
-              <a:t>Zone selector · 4-sensor live charts · raw vs interpolated · anomaly overlays</a:t>
+              <a:t>System health board · 6 service states · decision timeline · per-zone cards</a:t>
             </a:r>
             <a:endParaRPr lang="en-US" sz="1100" dirty="0"/>
           </a:p>
@@ -3388,8 +3388,8 @@
         </p:nvSpPr>
         <p:spPr>
           <a:xfrm>
-            <a:off x="8061960" y="2103120"/>
-            <a:ext cx="3596640" cy="1920240"/>
+            <a:off x="6217920" y="2103120"/>
+            <a:ext cx="2583180" cy="1828800"/>
           </a:xfrm>
           <a:prstGeom prst="rect">
             <a:avLst/>
@@ -3420,14 +3420,14 @@
         </p:nvSpPr>
         <p:spPr>
           <a:xfrm>
-            <a:off x="8061960" y="2103120"/>
-            <a:ext cx="3596640" cy="502920"/>
+            <a:off x="6217920" y="2103120"/>
+            <a:ext cx="2583180" cy="502920"/>
           </a:xfrm>
           <a:prstGeom prst="rect">
             <a:avLst/>
           </a:prstGeom>
           <a:solidFill>
-            <a:srgbClr val="EDE7FF"/>
+            <a:srgbClr val="E8F0FF"/>
           </a:solidFill>
           <a:ln w="12700">
             <a:solidFill>
@@ -3445,7 +3445,7 @@
         </p:nvSpPr>
         <p:spPr>
           <a:xfrm>
-            <a:off x="8244840" y="2212848"/>
+            <a:off x="6400800" y="2212848"/>
             <a:ext cx="548640" cy="292608"/>
           </a:xfrm>
           <a:prstGeom prst="rect">
@@ -3464,7 +3464,7 @@
             <a:r>
               <a:rPr lang="en-US" sz="1100" b="1" dirty="0">
                 <a:solidFill>
-                  <a:srgbClr val="6A4CFF"/>
+                  <a:srgbClr val="1F5DDE"/>
                 </a:solidFill>
                 <a:latin typeface="Consolas" pitchFamily="34" charset="0"/>
                 <a:ea typeface="Consolas" pitchFamily="34" charset="-122"/>
@@ -3484,8 +3484,8 @@
         </p:nvSpPr>
         <p:spPr>
           <a:xfrm>
-            <a:off x="8702040" y="2194560"/>
-            <a:ext cx="2773680" cy="329184"/>
+            <a:off x="6858000" y="2194560"/>
+            <a:ext cx="1760220" cy="329184"/>
           </a:xfrm>
           <a:prstGeom prst="rect">
             <a:avLst/>
@@ -3509,7 +3509,7 @@
                 <a:ea typeface="Segoe UI" pitchFamily="34" charset="-122"/>
                 <a:cs typeface="Segoe UI" pitchFamily="34" charset="-120"/>
               </a:rPr>
-              <a:t>Pipeline</a:t>
+              <a:t>Telemetry</a:t>
             </a:r>
             <a:endParaRPr lang="en-US" sz="1500" dirty="0"/>
           </a:p>
@@ -3523,8 +3523,8 @@
         </p:nvSpPr>
         <p:spPr>
           <a:xfrm>
-            <a:off x="8290560" y="2788920"/>
-            <a:ext cx="3185160" cy="1143000"/>
+            <a:off x="6446520" y="2788920"/>
+            <a:ext cx="2171700" cy="1051560"/>
           </a:xfrm>
           <a:prstGeom prst="rect">
             <a:avLst/>
@@ -3548,7 +3548,7 @@
                 <a:ea typeface="Segoe UI" pitchFamily="34" charset="-122"/>
                 <a:cs typeface="Segoe UI" pitchFamily="34" charset="-120"/>
               </a:rPr>
-              <a:t>6-agent topology · each agent's status / KPIs / role / source file</a:t>
+              <a:t>Zone selector · 4-sensor live charts · raw vs interpolated · anomaly overlays</a:t>
             </a:r>
             <a:endParaRPr lang="en-US" sz="1100" dirty="0"/>
           </a:p>
@@ -3562,8 +3562,8 @@
         </p:nvSpPr>
         <p:spPr>
           <a:xfrm>
-            <a:off x="502920" y="4251960"/>
-            <a:ext cx="3596640" cy="1920240"/>
+            <a:off x="9075420" y="2103120"/>
+            <a:ext cx="2583180" cy="1828800"/>
           </a:xfrm>
           <a:prstGeom prst="rect">
             <a:avLst/>
@@ -3594,14 +3594,14 @@
         </p:nvSpPr>
         <p:spPr>
           <a:xfrm>
-            <a:off x="502920" y="4251960"/>
-            <a:ext cx="3596640" cy="502920"/>
+            <a:off x="9075420" y="2103120"/>
+            <a:ext cx="2583180" cy="502920"/>
           </a:xfrm>
           <a:prstGeom prst="rect">
             <a:avLst/>
           </a:prstGeom>
           <a:solidFill>
-            <a:srgbClr val="FDE4E1"/>
+            <a:srgbClr val="EDE7FF"/>
           </a:solidFill>
           <a:ln w="12700">
             <a:solidFill>
@@ -3619,7 +3619,7 @@
         </p:nvSpPr>
         <p:spPr>
           <a:xfrm>
-            <a:off x="685800" y="4361688"/>
+            <a:off x="9258300" y="2212848"/>
             <a:ext cx="548640" cy="292608"/>
           </a:xfrm>
           <a:prstGeom prst="rect">
@@ -3638,7 +3638,7 @@
             <a:r>
               <a:rPr lang="en-US" sz="1100" b="1" dirty="0">
                 <a:solidFill>
-                  <a:srgbClr val="A1271D"/>
+                  <a:srgbClr val="6A4CFF"/>
                 </a:solidFill>
                 <a:latin typeface="Consolas" pitchFamily="34" charset="0"/>
                 <a:ea typeface="Consolas" pitchFamily="34" charset="-122"/>
@@ -3658,8 +3658,8 @@
         </p:nvSpPr>
         <p:spPr>
           <a:xfrm>
-            <a:off x="1143000" y="4343400"/>
-            <a:ext cx="2773680" cy="329184"/>
+            <a:off x="9715500" y="2194560"/>
+            <a:ext cx="1760220" cy="329184"/>
           </a:xfrm>
           <a:prstGeom prst="rect">
             <a:avLst/>
@@ -3683,7 +3683,7 @@
                 <a:ea typeface="Segoe UI" pitchFamily="34" charset="-122"/>
                 <a:cs typeface="Segoe UI" pitchFamily="34" charset="-120"/>
               </a:rPr>
-              <a:t>Alerts</a:t>
+              <a:t>Pipeline</a:t>
             </a:r>
             <a:endParaRPr lang="en-US" sz="1500" dirty="0"/>
           </a:p>
@@ -3697,8 +3697,8 @@
         </p:nvSpPr>
         <p:spPr>
           <a:xfrm>
-            <a:off x="731520" y="4937760"/>
-            <a:ext cx="3185160" cy="1143000"/>
+            <a:off x="9304020" y="2788920"/>
+            <a:ext cx="2171700" cy="1051560"/>
           </a:xfrm>
           <a:prstGeom prst="rect">
             <a:avLst/>
@@ -3722,7 +3722,7 @@
                 <a:ea typeface="Segoe UI" pitchFamily="34" charset="-122"/>
                 <a:cs typeface="Segoe UI" pitchFamily="34" charset="-120"/>
               </a:rPr>
-              <a:t>Severity · zone filters · diagnosis/action/evidence columns · CSV export</a:t>
+              <a:t>6-agent topology · each agent's status / KPIs / role / source file</a:t>
             </a:r>
             <a:endParaRPr lang="en-US" sz="1100" dirty="0"/>
           </a:p>
@@ -3736,8 +3736,8 @@
         </p:nvSpPr>
         <p:spPr>
           <a:xfrm>
-            <a:off x="4282440" y="4251960"/>
-            <a:ext cx="3596640" cy="1920240"/>
+            <a:off x="502920" y="4133088"/>
+            <a:ext cx="3535680" cy="1828800"/>
           </a:xfrm>
           <a:prstGeom prst="rect">
             <a:avLst/>
@@ -3768,14 +3768,14 @@
         </p:nvSpPr>
         <p:spPr>
           <a:xfrm>
-            <a:off x="4282440" y="4251960"/>
-            <a:ext cx="3596640" cy="502920"/>
+            <a:off x="502920" y="4133088"/>
+            <a:ext cx="3535680" cy="502920"/>
           </a:xfrm>
           <a:prstGeom prst="rect">
             <a:avLst/>
           </a:prstGeom>
           <a:solidFill>
-            <a:srgbClr val="E3F5EC"/>
+            <a:srgbClr val="FDE4E1"/>
           </a:solidFill>
           <a:ln w="12700">
             <a:solidFill>
@@ -3793,7 +3793,7 @@
         </p:nvSpPr>
         <p:spPr>
           <a:xfrm>
-            <a:off x="4465320" y="4361688"/>
+            <a:off x="685800" y="4242816"/>
             <a:ext cx="548640" cy="292608"/>
           </a:xfrm>
           <a:prstGeom prst="rect">
@@ -3812,7 +3812,7 @@
             <a:r>
               <a:rPr lang="en-US" sz="1100" b="1" dirty="0">
                 <a:solidFill>
-                  <a:srgbClr val="1F7A4D"/>
+                  <a:srgbClr val="A1271D"/>
                 </a:solidFill>
                 <a:latin typeface="Consolas" pitchFamily="34" charset="0"/>
                 <a:ea typeface="Consolas" pitchFamily="34" charset="-122"/>
@@ -3832,8 +3832,8 @@
         </p:nvSpPr>
         <p:spPr>
           <a:xfrm>
-            <a:off x="4922520" y="4343400"/>
-            <a:ext cx="2773680" cy="329184"/>
+            <a:off x="1143000" y="4224528"/>
+            <a:ext cx="2712720" cy="329184"/>
           </a:xfrm>
           <a:prstGeom prst="rect">
             <a:avLst/>
@@ -3857,7 +3857,7 @@
                 <a:ea typeface="Segoe UI" pitchFamily="34" charset="-122"/>
                 <a:cs typeface="Segoe UI" pitchFamily="34" charset="-120"/>
               </a:rPr>
-              <a:t>Scenario Lab</a:t>
+              <a:t>Alerts</a:t>
             </a:r>
             <a:endParaRPr lang="en-US" sz="1500" dirty="0"/>
           </a:p>
@@ -3871,8 +3871,8 @@
         </p:nvSpPr>
         <p:spPr>
           <a:xfrm>
-            <a:off x="4511040" y="4937760"/>
-            <a:ext cx="3185160" cy="1143000"/>
+            <a:off x="731520" y="4818888"/>
+            <a:ext cx="3124200" cy="1051560"/>
           </a:xfrm>
           <a:prstGeom prst="rect">
             <a:avLst/>
@@ -3896,7 +3896,7 @@
                 <a:ea typeface="Segoe UI" pitchFamily="34" charset="-122"/>
                 <a:cs typeface="Segoe UI" pitchFamily="34" charset="-120"/>
               </a:rPr>
-              <a:t>One-click inject of 5 presets · custom sensor-value form · recent injections</a:t>
+              <a:t>Severity · zone filters · diagnosis/action/evidence columns · CSV export</a:t>
             </a:r>
             <a:endParaRPr lang="en-US" sz="1100" dirty="0"/>
           </a:p>
@@ -3910,8 +3910,8 @@
         </p:nvSpPr>
         <p:spPr>
           <a:xfrm>
-            <a:off x="8061960" y="4251960"/>
-            <a:ext cx="3596640" cy="1920240"/>
+            <a:off x="4312920" y="4133088"/>
+            <a:ext cx="3535680" cy="1828800"/>
           </a:xfrm>
           <a:prstGeom prst="rect">
             <a:avLst/>
@@ -3942,8 +3942,8 @@
         </p:nvSpPr>
         <p:spPr>
           <a:xfrm>
-            <a:off x="8061960" y="4251960"/>
-            <a:ext cx="3596640" cy="502920"/>
+            <a:off x="4312920" y="4133088"/>
+            <a:ext cx="3535680" cy="502920"/>
           </a:xfrm>
           <a:prstGeom prst="rect">
             <a:avLst/>
@@ -3967,7 +3967,7 @@
         </p:nvSpPr>
         <p:spPr>
           <a:xfrm>
-            <a:off x="8244840" y="4361688"/>
+            <a:off x="4495800" y="4242816"/>
             <a:ext cx="548640" cy="292608"/>
           </a:xfrm>
           <a:prstGeom prst="rect">
@@ -4006,8 +4006,8 @@
         </p:nvSpPr>
         <p:spPr>
           <a:xfrm>
-            <a:off x="8702040" y="4343400"/>
-            <a:ext cx="2773680" cy="329184"/>
+            <a:off x="4953000" y="4224528"/>
+            <a:ext cx="2712720" cy="329184"/>
           </a:xfrm>
           <a:prstGeom prst="rect">
             <a:avLst/>
@@ -4031,6 +4031,180 @@
                 <a:ea typeface="Segoe UI" pitchFamily="34" charset="-122"/>
                 <a:cs typeface="Segoe UI" pitchFamily="34" charset="-120"/>
               </a:rPr>
+              <a:t>Scenario Lab</a:t>
+            </a:r>
+            <a:endParaRPr lang="en-US" sz="1500" dirty="0"/>
+          </a:p>
+        </p:txBody>
+      </p:sp>
+      <p:sp>
+        <p:nvSpPr>
+          <p:cNvPr id="35" name="Text 33"/>
+          <p:cNvSpPr/>
+          <p:nvPr/>
+        </p:nvSpPr>
+        <p:spPr>
+          <a:xfrm>
+            <a:off x="4541520" y="4818888"/>
+            <a:ext cx="3124200" cy="1051560"/>
+          </a:xfrm>
+          <a:prstGeom prst="rect">
+            <a:avLst/>
+          </a:prstGeom>
+          <a:noFill/>
+          <a:ln/>
+        </p:spPr>
+        <p:txBody>
+          <a:bodyPr wrap="square" lIns="0" tIns="0" rIns="0" bIns="0" rtlCol="0" anchor="ctr"/>
+          <a:lstStyle/>
+          <a:p>
+            <a:pPr indent="0" marL="0">
+              <a:buNone/>
+            </a:pPr>
+            <a:r>
+              <a:rPr lang="en-US" sz="1100" dirty="0">
+                <a:solidFill>
+                  <a:srgbClr val="42526E"/>
+                </a:solidFill>
+                <a:latin typeface="Segoe UI" pitchFamily="34" charset="0"/>
+                <a:ea typeface="Segoe UI" pitchFamily="34" charset="-122"/>
+                <a:cs typeface="Segoe UI" pitchFamily="34" charset="-120"/>
+              </a:rPr>
+              <a:t>One-click inject of 5 presets · custom sensor-value form · recent injections</a:t>
+            </a:r>
+            <a:endParaRPr lang="en-US" sz="1100" dirty="0"/>
+          </a:p>
+        </p:txBody>
+      </p:sp>
+      <p:sp>
+        <p:nvSpPr>
+          <p:cNvPr id="36" name="Shape 34"/>
+          <p:cNvSpPr/>
+          <p:nvPr/>
+        </p:nvSpPr>
+        <p:spPr>
+          <a:xfrm>
+            <a:off x="8122920" y="4133088"/>
+            <a:ext cx="3535680" cy="1828800"/>
+          </a:xfrm>
+          <a:prstGeom prst="rect">
+            <a:avLst/>
+          </a:prstGeom>
+          <a:solidFill>
+            <a:srgbClr val="FFFFFF"/>
+          </a:solidFill>
+          <a:ln w="9525">
+            <a:solidFill>
+              <a:srgbClr val="E1E4E8"/>
+            </a:solidFill>
+            <a:prstDash val="solid"/>
+          </a:ln>
+          <a:effectLst>
+            <a:outerShdw sx="100000" sy="100000" kx="0" ky="0" algn="bl" rotWithShape="0" blurRad="127000" dist="25400" dir="5400000">
+              <a:srgbClr val="0F1B3D">
+                <a:alpha val="8000"/>
+              </a:srgbClr>
+            </a:outerShdw>
+          </a:effectLst>
+        </p:spPr>
+      </p:sp>
+      <p:sp>
+        <p:nvSpPr>
+          <p:cNvPr id="37" name="Shape 35"/>
+          <p:cNvSpPr/>
+          <p:nvPr/>
+        </p:nvSpPr>
+        <p:spPr>
+          <a:xfrm>
+            <a:off x="8122920" y="4133088"/>
+            <a:ext cx="3535680" cy="502920"/>
+          </a:xfrm>
+          <a:prstGeom prst="rect">
+            <a:avLst/>
+          </a:prstGeom>
+          <a:solidFill>
+            <a:srgbClr val="E3F5EC"/>
+          </a:solidFill>
+          <a:ln w="12700">
+            <a:solidFill>
+              <a:srgbClr val="333333"/>
+            </a:solidFill>
+            <a:prstDash val="solid"/>
+          </a:ln>
+        </p:spPr>
+      </p:sp>
+      <p:sp>
+        <p:nvSpPr>
+          <p:cNvPr id="38" name="Text 36"/>
+          <p:cNvSpPr/>
+          <p:nvPr/>
+        </p:nvSpPr>
+        <p:spPr>
+          <a:xfrm>
+            <a:off x="8305800" y="4242816"/>
+            <a:ext cx="548640" cy="292608"/>
+          </a:xfrm>
+          <a:prstGeom prst="rect">
+            <a:avLst/>
+          </a:prstGeom>
+          <a:noFill/>
+          <a:ln/>
+        </p:spPr>
+        <p:txBody>
+          <a:bodyPr wrap="square" lIns="0" tIns="0" rIns="0" bIns="0" rtlCol="0" anchor="ctr"/>
+          <a:lstStyle/>
+          <a:p>
+            <a:pPr indent="0" marL="0">
+              <a:buNone/>
+            </a:pPr>
+            <a:r>
+              <a:rPr lang="en-US" sz="1100" b="1" dirty="0">
+                <a:solidFill>
+                  <a:srgbClr val="1F7A4D"/>
+                </a:solidFill>
+                <a:latin typeface="Consolas" pitchFamily="34" charset="0"/>
+                <a:ea typeface="Consolas" pitchFamily="34" charset="-122"/>
+                <a:cs typeface="Consolas" pitchFamily="34" charset="-120"/>
+              </a:rPr>
+              <a:t>07</a:t>
+            </a:r>
+            <a:endParaRPr lang="en-US" sz="1100" dirty="0"/>
+          </a:p>
+        </p:txBody>
+      </p:sp>
+      <p:sp>
+        <p:nvSpPr>
+          <p:cNvPr id="39" name="Text 37"/>
+          <p:cNvSpPr/>
+          <p:nvPr/>
+        </p:nvSpPr>
+        <p:spPr>
+          <a:xfrm>
+            <a:off x="8763000" y="4224528"/>
+            <a:ext cx="2712720" cy="329184"/>
+          </a:xfrm>
+          <a:prstGeom prst="rect">
+            <a:avLst/>
+          </a:prstGeom>
+          <a:noFill/>
+          <a:ln/>
+        </p:spPr>
+        <p:txBody>
+          <a:bodyPr wrap="square" lIns="0" tIns="0" rIns="0" bIns="0" rtlCol="0" anchor="ctr"/>
+          <a:lstStyle/>
+          <a:p>
+            <a:pPr indent="0" marL="0">
+              <a:buNone/>
+            </a:pPr>
+            <a:r>
+              <a:rPr lang="en-US" sz="1500" b="1" dirty="0">
+                <a:solidFill>
+                  <a:srgbClr val="172B4D"/>
+                </a:solidFill>
+                <a:latin typeface="Segoe UI" pitchFamily="34" charset="0"/>
+                <a:ea typeface="Segoe UI" pitchFamily="34" charset="-122"/>
+                <a:cs typeface="Segoe UI" pitchFamily="34" charset="-120"/>
+              </a:rPr>
               <a:t>Quality Metrics</a:t>
             </a:r>
             <a:endParaRPr lang="en-US" sz="1500" dirty="0"/>
@@ -4039,14 +4213,14 @@
       </p:sp>
       <p:sp>
         <p:nvSpPr>
-          <p:cNvPr id="35" name="Text 33"/>
-          <p:cNvSpPr/>
-          <p:nvPr/>
-        </p:nvSpPr>
-        <p:spPr>
-          <a:xfrm>
-            <a:off x="8290560" y="4937760"/>
-            <a:ext cx="3185160" cy="1143000"/>
+          <p:cNvPr id="40" name="Text 38"/>
+          <p:cNvSpPr/>
+          <p:nvPr/>
+        </p:nvSpPr>
+        <p:spPr>
+          <a:xfrm>
+            <a:off x="8351520" y="4818888"/>
+            <a:ext cx="3124200" cy="1051560"/>
           </a:xfrm>
           <a:prstGeom prst="rect">
             <a:avLst/>
@@ -4078,7 +4252,7 @@
       </p:sp>
       <p:sp>
         <p:nvSpPr>
-          <p:cNvPr id="36" name="Shape 34"/>
+          <p:cNvPr id="41" name="Shape 39"/>
           <p:cNvSpPr/>
           <p:nvPr/>
         </p:nvSpPr>
@@ -4103,7 +4277,7 @@
       </p:sp>
       <p:sp>
         <p:nvSpPr>
-          <p:cNvPr id="37" name="Text 35"/>
+          <p:cNvPr id="42" name="Text 40"/>
           <p:cNvSpPr/>
           <p:nvPr/>
         </p:nvSpPr>
@@ -4142,7 +4316,7 @@
       </p:sp>
       <p:sp>
         <p:nvSpPr>
-          <p:cNvPr id="38" name="Text 36"/>
+          <p:cNvPr id="43" name="Text 41"/>
           <p:cNvSpPr/>
           <p:nvPr/>
         </p:nvSpPr>
@@ -4604,14 +4778,53 @@
       </p:sp>
       <p:sp>
         <p:nvSpPr>
-          <p:cNvPr id="14" name="Shape 12"/>
+          <p:cNvPr id="14" name="Text 12"/>
           <p:cNvSpPr/>
           <p:nvPr/>
         </p:nvSpPr>
         <p:spPr>
           <a:xfrm>
             <a:off x="640080" y="2724912"/>
-            <a:ext cx="853440" cy="237744"/>
+            <a:ext cx="731520" cy="237744"/>
+          </a:xfrm>
+          <a:prstGeom prst="rect">
+            <a:avLst/>
+          </a:prstGeom>
+          <a:noFill/>
+          <a:ln/>
+        </p:spPr>
+        <p:txBody>
+          <a:bodyPr wrap="square" lIns="0" tIns="0" rIns="0" bIns="0" rtlCol="0" anchor="ctr"/>
+          <a:lstStyle/>
+          <a:p>
+            <a:pPr algn="ctr" indent="0" marL="0">
+              <a:buNone/>
+            </a:pPr>
+            <a:r>
+              <a:rPr lang="en-US" sz="800" dirty="0">
+                <a:solidFill>
+                  <a:srgbClr val="6B778C"/>
+                </a:solidFill>
+                <a:latin typeface="Segoe UI" pitchFamily="34" charset="0"/>
+                <a:ea typeface="Segoe UI" pitchFamily="34" charset="-122"/>
+                <a:cs typeface="Segoe UI" pitchFamily="34" charset="-120"/>
+              </a:rPr>
+              <a:t>Building</a:t>
+            </a:r>
+            <a:endParaRPr lang="en-US" sz="800" dirty="0"/>
+          </a:p>
+        </p:txBody>
+      </p:sp>
+      <p:sp>
+        <p:nvSpPr>
+          <p:cNvPr id="15" name="Shape 13"/>
+          <p:cNvSpPr/>
+          <p:nvPr/>
+        </p:nvSpPr>
+        <p:spPr>
+          <a:xfrm>
+            <a:off x="1371600" y="2724912"/>
+            <a:ext cx="731520" cy="237744"/>
           </a:xfrm>
           <a:prstGeom prst="rect">
             <a:avLst/>
@@ -4629,14 +4842,14 @@
       </p:sp>
       <p:sp>
         <p:nvSpPr>
-          <p:cNvPr id="15" name="Text 13"/>
-          <p:cNvSpPr/>
-          <p:nvPr/>
-        </p:nvSpPr>
-        <p:spPr>
-          <a:xfrm>
-            <a:off x="640080" y="2724912"/>
-            <a:ext cx="853440" cy="237744"/>
+          <p:cNvPr id="16" name="Text 14"/>
+          <p:cNvSpPr/>
+          <p:nvPr/>
+        </p:nvSpPr>
+        <p:spPr>
+          <a:xfrm>
+            <a:off x="1371600" y="2724912"/>
+            <a:ext cx="731520" cy="237744"/>
           </a:xfrm>
           <a:prstGeom prst="rect">
             <a:avLst/>
@@ -4668,14 +4881,14 @@
       </p:sp>
       <p:sp>
         <p:nvSpPr>
-          <p:cNvPr id="16" name="Text 14"/>
-          <p:cNvSpPr/>
-          <p:nvPr/>
-        </p:nvSpPr>
-        <p:spPr>
-          <a:xfrm>
-            <a:off x="1493520" y="2724912"/>
-            <a:ext cx="853440" cy="237744"/>
+          <p:cNvPr id="17" name="Text 15"/>
+          <p:cNvSpPr/>
+          <p:nvPr/>
+        </p:nvSpPr>
+        <p:spPr>
+          <a:xfrm>
+            <a:off x="2103120" y="2724912"/>
+            <a:ext cx="731520" cy="237744"/>
           </a:xfrm>
           <a:prstGeom prst="rect">
             <a:avLst/>
@@ -4707,14 +4920,14 @@
       </p:sp>
       <p:sp>
         <p:nvSpPr>
-          <p:cNvPr id="17" name="Text 15"/>
-          <p:cNvSpPr/>
-          <p:nvPr/>
-        </p:nvSpPr>
-        <p:spPr>
-          <a:xfrm>
-            <a:off x="2346960" y="2724912"/>
-            <a:ext cx="853440" cy="237744"/>
+          <p:cNvPr id="18" name="Text 16"/>
+          <p:cNvSpPr/>
+          <p:nvPr/>
+        </p:nvSpPr>
+        <p:spPr>
+          <a:xfrm>
+            <a:off x="2834640" y="2724912"/>
+            <a:ext cx="731520" cy="237744"/>
           </a:xfrm>
           <a:prstGeom prst="rect">
             <a:avLst/>
@@ -4746,14 +4959,14 @@
       </p:sp>
       <p:sp>
         <p:nvSpPr>
-          <p:cNvPr id="18" name="Text 16"/>
-          <p:cNvSpPr/>
-          <p:nvPr/>
-        </p:nvSpPr>
-        <p:spPr>
-          <a:xfrm>
-            <a:off x="3200400" y="2724912"/>
-            <a:ext cx="853440" cy="237744"/>
+          <p:cNvPr id="19" name="Text 17"/>
+          <p:cNvSpPr/>
+          <p:nvPr/>
+        </p:nvSpPr>
+        <p:spPr>
+          <a:xfrm>
+            <a:off x="3566160" y="2724912"/>
+            <a:ext cx="731520" cy="237744"/>
           </a:xfrm>
           <a:prstGeom prst="rect">
             <a:avLst/>
@@ -4785,14 +4998,14 @@
       </p:sp>
       <p:sp>
         <p:nvSpPr>
-          <p:cNvPr id="19" name="Text 17"/>
-          <p:cNvSpPr/>
-          <p:nvPr/>
-        </p:nvSpPr>
-        <p:spPr>
-          <a:xfrm>
-            <a:off x="4053840" y="2724912"/>
-            <a:ext cx="853440" cy="237744"/>
+          <p:cNvPr id="20" name="Text 18"/>
+          <p:cNvSpPr/>
+          <p:nvPr/>
+        </p:nvSpPr>
+        <p:spPr>
+          <a:xfrm>
+            <a:off x="4297680" y="2724912"/>
+            <a:ext cx="731520" cy="237744"/>
           </a:xfrm>
           <a:prstGeom prst="rect">
             <a:avLst/>
@@ -4824,14 +5037,14 @@
       </p:sp>
       <p:sp>
         <p:nvSpPr>
-          <p:cNvPr id="20" name="Text 18"/>
-          <p:cNvSpPr/>
-          <p:nvPr/>
-        </p:nvSpPr>
-        <p:spPr>
-          <a:xfrm>
-            <a:off x="4907280" y="2724912"/>
-            <a:ext cx="853440" cy="237744"/>
+          <p:cNvPr id="21" name="Text 19"/>
+          <p:cNvSpPr/>
+          <p:nvPr/>
+        </p:nvSpPr>
+        <p:spPr>
+          <a:xfrm>
+            <a:off x="5029200" y="2724912"/>
+            <a:ext cx="731520" cy="237744"/>
           </a:xfrm>
           <a:prstGeom prst="rect">
             <a:avLst/>
@@ -4863,7 +5076,7 @@
       </p:sp>
       <p:sp>
         <p:nvSpPr>
-          <p:cNvPr id="21" name="Shape 19"/>
+          <p:cNvPr id="22" name="Shape 20"/>
           <p:cNvSpPr/>
           <p:nvPr/>
         </p:nvSpPr>
@@ -4888,7 +5101,7 @@
       </p:sp>
       <p:sp>
         <p:nvSpPr>
-          <p:cNvPr id="22" name="Text 20"/>
+          <p:cNvPr id="23" name="Text 21"/>
           <p:cNvSpPr/>
           <p:nvPr/>
         </p:nvSpPr>
@@ -4927,7 +5140,7 @@
       </p:sp>
       <p:sp>
         <p:nvSpPr>
-          <p:cNvPr id="23" name="Text 21"/>
+          <p:cNvPr id="24" name="Text 22"/>
           <p:cNvSpPr/>
           <p:nvPr/>
         </p:nvSpPr>
@@ -4966,7 +5179,7 @@
       </p:sp>
       <p:sp>
         <p:nvSpPr>
-          <p:cNvPr id="24" name="Shape 22"/>
+          <p:cNvPr id="25" name="Shape 23"/>
           <p:cNvSpPr/>
           <p:nvPr/>
         </p:nvSpPr>
@@ -4991,7 +5204,7 @@
       </p:sp>
       <p:sp>
         <p:nvSpPr>
-          <p:cNvPr id="25" name="Text 23"/>
+          <p:cNvPr id="26" name="Text 24"/>
           <p:cNvSpPr/>
           <p:nvPr/>
         </p:nvSpPr>
@@ -5030,7 +5243,7 @@
       </p:sp>
       <p:sp>
         <p:nvSpPr>
-          <p:cNvPr id="26" name="Text 24"/>
+          <p:cNvPr id="27" name="Text 25"/>
           <p:cNvSpPr/>
           <p:nvPr/>
         </p:nvSpPr>
@@ -5069,7 +5282,7 @@
       </p:sp>
       <p:sp>
         <p:nvSpPr>
-          <p:cNvPr id="27" name="Shape 25"/>
+          <p:cNvPr id="28" name="Shape 26"/>
           <p:cNvSpPr/>
           <p:nvPr/>
         </p:nvSpPr>
@@ -5094,7 +5307,7 @@
       </p:sp>
       <p:sp>
         <p:nvSpPr>
-          <p:cNvPr id="28" name="Text 26"/>
+          <p:cNvPr id="29" name="Text 27"/>
           <p:cNvSpPr/>
           <p:nvPr/>
         </p:nvSpPr>
@@ -5133,7 +5346,7 @@
       </p:sp>
       <p:sp>
         <p:nvSpPr>
-          <p:cNvPr id="29" name="Text 27"/>
+          <p:cNvPr id="30" name="Text 28"/>
           <p:cNvSpPr/>
           <p:nvPr/>
         </p:nvSpPr>
@@ -5172,7 +5385,7 @@
       </p:sp>
       <p:sp>
         <p:nvSpPr>
-          <p:cNvPr id="30" name="Shape 28"/>
+          <p:cNvPr id="31" name="Shape 29"/>
           <p:cNvSpPr/>
           <p:nvPr/>
         </p:nvSpPr>
@@ -5197,7 +5410,7 @@
       </p:sp>
       <p:sp>
         <p:nvSpPr>
-          <p:cNvPr id="31" name="Text 29"/>
+          <p:cNvPr id="32" name="Text 30"/>
           <p:cNvSpPr/>
           <p:nvPr/>
         </p:nvSpPr>
@@ -5236,7 +5449,7 @@
       </p:sp>
       <p:sp>
         <p:nvSpPr>
-          <p:cNvPr id="32" name="Text 30"/>
+          <p:cNvPr id="33" name="Text 31"/>
           <p:cNvSpPr/>
           <p:nvPr/>
         </p:nvSpPr>
@@ -5275,7 +5488,7 @@
       </p:sp>
       <p:sp>
         <p:nvSpPr>
-          <p:cNvPr id="33" name="Shape 31"/>
+          <p:cNvPr id="34" name="Shape 32"/>
           <p:cNvSpPr/>
           <p:nvPr/>
         </p:nvSpPr>
@@ -5300,7 +5513,7 @@
       </p:sp>
       <p:sp>
         <p:nvSpPr>
-          <p:cNvPr id="34" name="Text 32"/>
+          <p:cNvPr id="35" name="Text 33"/>
           <p:cNvSpPr/>
           <p:nvPr/>
         </p:nvSpPr>
@@ -5339,7 +5552,7 @@
       </p:sp>
       <p:sp>
         <p:nvSpPr>
-          <p:cNvPr id="35" name="Text 33"/>
+          <p:cNvPr id="36" name="Text 34"/>
           <p:cNvSpPr/>
           <p:nvPr/>
         </p:nvSpPr>
@@ -5378,7 +5591,7 @@
       </p:sp>
       <p:sp>
         <p:nvSpPr>
-          <p:cNvPr id="36" name="Shape 34"/>
+          <p:cNvPr id="37" name="Shape 35"/>
           <p:cNvSpPr/>
           <p:nvPr/>
         </p:nvSpPr>
@@ -5403,7 +5616,7 @@
       </p:sp>
       <p:sp>
         <p:nvSpPr>
-          <p:cNvPr id="37" name="Text 35"/>
+          <p:cNvPr id="38" name="Text 36"/>
           <p:cNvSpPr/>
           <p:nvPr/>
         </p:nvSpPr>
@@ -5442,7 +5655,7 @@
       </p:sp>
       <p:sp>
         <p:nvSpPr>
-          <p:cNvPr id="38" name="Text 36"/>
+          <p:cNvPr id="39" name="Text 37"/>
           <p:cNvSpPr/>
           <p:nvPr/>
         </p:nvSpPr>
@@ -5481,7 +5694,7 @@
       </p:sp>
       <p:sp>
         <p:nvSpPr>
-          <p:cNvPr id="39" name="Text 37"/>
+          <p:cNvPr id="40" name="Text 38"/>
           <p:cNvSpPr/>
           <p:nvPr/>
         </p:nvSpPr>
@@ -5520,7 +5733,7 @@
       </p:sp>
       <p:sp>
         <p:nvSpPr>
-          <p:cNvPr id="40" name="Shape 38"/>
+          <p:cNvPr id="41" name="Shape 39"/>
           <p:cNvSpPr/>
           <p:nvPr/>
         </p:nvSpPr>
@@ -5545,7 +5758,7 @@
       </p:sp>
       <p:sp>
         <p:nvSpPr>
-          <p:cNvPr id="41" name="Text 39"/>
+          <p:cNvPr id="42" name="Text 40"/>
           <p:cNvSpPr/>
           <p:nvPr/>
         </p:nvSpPr>
@@ -5584,7 +5797,7 @@
       </p:sp>
       <p:sp>
         <p:nvSpPr>
-          <p:cNvPr id="42" name="Shape 40"/>
+          <p:cNvPr id="43" name="Shape 41"/>
           <p:cNvSpPr/>
           <p:nvPr/>
         </p:nvSpPr>
@@ -5609,7 +5822,7 @@
       </p:sp>
       <p:sp>
         <p:nvSpPr>
-          <p:cNvPr id="43" name="Text 41"/>
+          <p:cNvPr id="44" name="Text 42"/>
           <p:cNvSpPr/>
           <p:nvPr/>
         </p:nvSpPr>
@@ -5648,7 +5861,7 @@
       </p:sp>
       <p:sp>
         <p:nvSpPr>
-          <p:cNvPr id="44" name="Shape 42"/>
+          <p:cNvPr id="45" name="Shape 43"/>
           <p:cNvSpPr/>
           <p:nvPr/>
         </p:nvSpPr>
@@ -5673,7 +5886,7 @@
       </p:sp>
       <p:sp>
         <p:nvSpPr>
-          <p:cNvPr id="45" name="Text 43"/>
+          <p:cNvPr id="46" name="Text 44"/>
           <p:cNvSpPr/>
           <p:nvPr/>
         </p:nvSpPr>
@@ -5712,7 +5925,7 @@
       </p:sp>
       <p:sp>
         <p:nvSpPr>
-          <p:cNvPr id="46" name="Shape 44"/>
+          <p:cNvPr id="47" name="Shape 45"/>
           <p:cNvSpPr/>
           <p:nvPr/>
         </p:nvSpPr>
@@ -5737,7 +5950,7 @@
       </p:sp>
       <p:sp>
         <p:nvSpPr>
-          <p:cNvPr id="47" name="Text 45"/>
+          <p:cNvPr id="48" name="Text 46"/>
           <p:cNvSpPr/>
           <p:nvPr/>
         </p:nvSpPr>
@@ -5776,7 +5989,7 @@
       </p:sp>
       <p:sp>
         <p:nvSpPr>
-          <p:cNvPr id="48" name="Shape 46"/>
+          <p:cNvPr id="49" name="Shape 47"/>
           <p:cNvSpPr/>
           <p:nvPr/>
         </p:nvSpPr>
@@ -5801,7 +6014,7 @@
       </p:sp>
       <p:sp>
         <p:nvSpPr>
-          <p:cNvPr id="49" name="Text 47"/>
+          <p:cNvPr id="50" name="Text 48"/>
           <p:cNvSpPr/>
           <p:nvPr/>
         </p:nvSpPr>
@@ -5840,7 +6053,7 @@
       </p:sp>
       <p:sp>
         <p:nvSpPr>
-          <p:cNvPr id="50" name="Shape 48"/>
+          <p:cNvPr id="51" name="Shape 49"/>
           <p:cNvSpPr/>
           <p:nvPr/>
         </p:nvSpPr>
@@ -5865,7 +6078,7 @@
       </p:sp>
       <p:sp>
         <p:nvSpPr>
-          <p:cNvPr id="51" name="Text 49"/>
+          <p:cNvPr id="52" name="Text 50"/>
           <p:cNvSpPr/>
           <p:nvPr/>
         </p:nvSpPr>
@@ -5904,7 +6117,7 @@
       </p:sp>
       <p:sp>
         <p:nvSpPr>
-          <p:cNvPr id="52" name="Shape 50"/>
+          <p:cNvPr id="53" name="Shape 51"/>
           <p:cNvSpPr/>
           <p:nvPr/>
         </p:nvSpPr>
@@ -5929,7 +6142,7 @@
       </p:sp>
       <p:sp>
         <p:nvSpPr>
-          <p:cNvPr id="53" name="Text 51"/>
+          <p:cNvPr id="54" name="Text 52"/>
           <p:cNvSpPr/>
           <p:nvPr/>
         </p:nvSpPr>
@@ -5968,7 +6181,7 @@
       </p:sp>
       <p:sp>
         <p:nvSpPr>
-          <p:cNvPr id="54" name="Shape 52"/>
+          <p:cNvPr id="55" name="Shape 53"/>
           <p:cNvSpPr/>
           <p:nvPr/>
         </p:nvSpPr>
@@ -5993,7 +6206,7 @@
       </p:sp>
       <p:sp>
         <p:nvSpPr>
-          <p:cNvPr id="55" name="Text 53"/>
+          <p:cNvPr id="56" name="Text 54"/>
           <p:cNvSpPr/>
           <p:nvPr/>
         </p:nvSpPr>
@@ -6032,7 +6245,7 @@
       </p:sp>
       <p:sp>
         <p:nvSpPr>
-          <p:cNvPr id="56" name="Shape 54"/>
+          <p:cNvPr id="57" name="Shape 55"/>
           <p:cNvSpPr/>
           <p:nvPr/>
         </p:nvSpPr>
@@ -6057,7 +6270,7 @@
       </p:sp>
       <p:sp>
         <p:nvSpPr>
-          <p:cNvPr id="57" name="Text 55"/>
+          <p:cNvPr id="58" name="Text 56"/>
           <p:cNvSpPr/>
           <p:nvPr/>
         </p:nvSpPr>
@@ -6096,7 +6309,7 @@
       </p:sp>
       <p:sp>
         <p:nvSpPr>
-          <p:cNvPr id="58" name="Shape 56"/>
+          <p:cNvPr id="59" name="Shape 57"/>
           <p:cNvSpPr/>
           <p:nvPr/>
         </p:nvSpPr>
@@ -6121,7 +6334,7 @@
       </p:sp>
       <p:sp>
         <p:nvSpPr>
-          <p:cNvPr id="59" name="Text 57"/>
+          <p:cNvPr id="60" name="Text 58"/>
           <p:cNvSpPr/>
           <p:nvPr/>
         </p:nvSpPr>
@@ -6160,7 +6373,7 @@
       </p:sp>
       <p:sp>
         <p:nvSpPr>
-          <p:cNvPr id="60" name="Shape 58"/>
+          <p:cNvPr id="61" name="Shape 59"/>
           <p:cNvSpPr/>
           <p:nvPr/>
         </p:nvSpPr>
@@ -6185,7 +6398,7 @@
       </p:sp>
       <p:sp>
         <p:nvSpPr>
-          <p:cNvPr id="61" name="Text 59"/>
+          <p:cNvPr id="62" name="Text 60"/>
           <p:cNvSpPr/>
           <p:nvPr/>
         </p:nvSpPr>
@@ -6224,7 +6437,7 @@
       </p:sp>
       <p:sp>
         <p:nvSpPr>
-          <p:cNvPr id="62" name="Shape 60"/>
+          <p:cNvPr id="63" name="Shape 61"/>
           <p:cNvSpPr/>
           <p:nvPr/>
         </p:nvSpPr>
@@ -6249,7 +6462,7 @@
       </p:sp>
       <p:sp>
         <p:nvSpPr>
-          <p:cNvPr id="63" name="Text 61"/>
+          <p:cNvPr id="64" name="Text 62"/>
           <p:cNvSpPr/>
           <p:nvPr/>
         </p:nvSpPr>
@@ -6288,7 +6501,7 @@
       </p:sp>
       <p:sp>
         <p:nvSpPr>
-          <p:cNvPr id="64" name="Text 62"/>
+          <p:cNvPr id="65" name="Text 63"/>
           <p:cNvSpPr/>
           <p:nvPr/>
         </p:nvSpPr>
@@ -6319,7 +6532,7 @@
                 <a:ea typeface="Segoe UI" pitchFamily="34" charset="-122"/>
                 <a:cs typeface="Segoe UI" pitchFamily="34" charset="-120"/>
               </a:rPr>
-              <a:t>Tab #1  —  Operations View</a:t>
+              <a:t>Tab #2  —  Operations View</a:t>
             </a:r>
             <a:endParaRPr lang="en-US" sz="1000" dirty="0"/>
           </a:p>
@@ -6327,7 +6540,7 @@
       </p:sp>
       <p:sp>
         <p:nvSpPr>
-          <p:cNvPr id="65" name="Shape 63"/>
+          <p:cNvPr id="66" name="Shape 64"/>
           <p:cNvSpPr/>
           <p:nvPr/>
         </p:nvSpPr>
@@ -6359,7 +6572,7 @@
       </p:sp>
       <p:sp>
         <p:nvSpPr>
-          <p:cNvPr id="66" name="Shape 64"/>
+          <p:cNvPr id="67" name="Shape 65"/>
           <p:cNvSpPr/>
           <p:nvPr/>
         </p:nvSpPr>
@@ -6384,7 +6597,7 @@
       </p:sp>
       <p:sp>
         <p:nvSpPr>
-          <p:cNvPr id="67" name="Shape 65"/>
+          <p:cNvPr id="68" name="Shape 66"/>
           <p:cNvSpPr/>
           <p:nvPr/>
         </p:nvSpPr>
@@ -6409,7 +6622,7 @@
       </p:sp>
       <p:sp>
         <p:nvSpPr>
-          <p:cNvPr id="68" name="Text 66"/>
+          <p:cNvPr id="69" name="Text 67"/>
           <p:cNvSpPr/>
           <p:nvPr/>
         </p:nvSpPr>
@@ -6448,7 +6661,7 @@
       </p:sp>
       <p:sp>
         <p:nvSpPr>
-          <p:cNvPr id="69" name="Text 67"/>
+          <p:cNvPr id="70" name="Text 68"/>
           <p:cNvSpPr/>
           <p:nvPr/>
         </p:nvSpPr>
@@ -6487,7 +6700,7 @@
       </p:sp>
       <p:sp>
         <p:nvSpPr>
-          <p:cNvPr id="70" name="Shape 68"/>
+          <p:cNvPr id="71" name="Shape 69"/>
           <p:cNvSpPr/>
           <p:nvPr/>
         </p:nvSpPr>
@@ -6512,7 +6725,7 @@
       </p:sp>
       <p:sp>
         <p:nvSpPr>
-          <p:cNvPr id="71" name="Text 69"/>
+          <p:cNvPr id="72" name="Text 70"/>
           <p:cNvSpPr/>
           <p:nvPr/>
         </p:nvSpPr>
@@ -6551,7 +6764,7 @@
       </p:sp>
       <p:sp>
         <p:nvSpPr>
-          <p:cNvPr id="72" name="Shape 70"/>
+          <p:cNvPr id="73" name="Shape 71"/>
           <p:cNvSpPr/>
           <p:nvPr/>
         </p:nvSpPr>
@@ -6576,14 +6789,14 @@
       </p:sp>
       <p:sp>
         <p:nvSpPr>
-          <p:cNvPr id="73" name="Text 71"/>
+          <p:cNvPr id="74" name="Text 72"/>
           <p:cNvSpPr/>
           <p:nvPr/>
         </p:nvSpPr>
         <p:spPr>
           <a:xfrm>
             <a:off x="6400800" y="2724912"/>
-            <a:ext cx="853440" cy="237744"/>
+            <a:ext cx="731520" cy="237744"/>
           </a:xfrm>
           <a:prstGeom prst="rect">
             <a:avLst/>
@@ -6607,6 +6820,45 @@
                 <a:ea typeface="Segoe UI" pitchFamily="34" charset="-122"/>
                 <a:cs typeface="Segoe UI" pitchFamily="34" charset="-120"/>
               </a:rPr>
+              <a:t>Building</a:t>
+            </a:r>
+            <a:endParaRPr lang="en-US" sz="800" dirty="0"/>
+          </a:p>
+        </p:txBody>
+      </p:sp>
+      <p:sp>
+        <p:nvSpPr>
+          <p:cNvPr id="75" name="Text 73"/>
+          <p:cNvSpPr/>
+          <p:nvPr/>
+        </p:nvSpPr>
+        <p:spPr>
+          <a:xfrm>
+            <a:off x="7132320" y="2724912"/>
+            <a:ext cx="731520" cy="237744"/>
+          </a:xfrm>
+          <a:prstGeom prst="rect">
+            <a:avLst/>
+          </a:prstGeom>
+          <a:noFill/>
+          <a:ln/>
+        </p:spPr>
+        <p:txBody>
+          <a:bodyPr wrap="square" lIns="0" tIns="0" rIns="0" bIns="0" rtlCol="0" anchor="ctr"/>
+          <a:lstStyle/>
+          <a:p>
+            <a:pPr algn="ctr" indent="0" marL="0">
+              <a:buNone/>
+            </a:pPr>
+            <a:r>
+              <a:rPr lang="en-US" sz="800" dirty="0">
+                <a:solidFill>
+                  <a:srgbClr val="6B778C"/>
+                </a:solidFill>
+                <a:latin typeface="Segoe UI" pitchFamily="34" charset="0"/>
+                <a:ea typeface="Segoe UI" pitchFamily="34" charset="-122"/>
+                <a:cs typeface="Segoe UI" pitchFamily="34" charset="-120"/>
+              </a:rPr>
               <a:t>Operations</a:t>
             </a:r>
             <a:endParaRPr lang="en-US" sz="800" dirty="0"/>
@@ -6615,14 +6867,14 @@
       </p:sp>
       <p:sp>
         <p:nvSpPr>
-          <p:cNvPr id="74" name="Text 72"/>
-          <p:cNvSpPr/>
-          <p:nvPr/>
-        </p:nvSpPr>
-        <p:spPr>
-          <a:xfrm>
-            <a:off x="7254240" y="2724912"/>
-            <a:ext cx="853440" cy="237744"/>
+          <p:cNvPr id="76" name="Text 74"/>
+          <p:cNvSpPr/>
+          <p:nvPr/>
+        </p:nvSpPr>
+        <p:spPr>
+          <a:xfrm>
+            <a:off x="7863840" y="2724912"/>
+            <a:ext cx="731520" cy="237744"/>
           </a:xfrm>
           <a:prstGeom prst="rect">
             <a:avLst/>
@@ -6654,14 +6906,14 @@
       </p:sp>
       <p:sp>
         <p:nvSpPr>
-          <p:cNvPr id="75" name="Text 73"/>
-          <p:cNvSpPr/>
-          <p:nvPr/>
-        </p:nvSpPr>
-        <p:spPr>
-          <a:xfrm>
-            <a:off x="8107680" y="2724912"/>
-            <a:ext cx="853440" cy="237744"/>
+          <p:cNvPr id="77" name="Text 75"/>
+          <p:cNvSpPr/>
+          <p:nvPr/>
+        </p:nvSpPr>
+        <p:spPr>
+          <a:xfrm>
+            <a:off x="8595360" y="2724912"/>
+            <a:ext cx="731520" cy="237744"/>
           </a:xfrm>
           <a:prstGeom prst="rect">
             <a:avLst/>
@@ -6693,14 +6945,14 @@
       </p:sp>
       <p:sp>
         <p:nvSpPr>
-          <p:cNvPr id="76" name="Shape 74"/>
-          <p:cNvSpPr/>
-          <p:nvPr/>
-        </p:nvSpPr>
-        <p:spPr>
-          <a:xfrm>
-            <a:off x="8961120" y="2724912"/>
-            <a:ext cx="853440" cy="237744"/>
+          <p:cNvPr id="78" name="Shape 76"/>
+          <p:cNvSpPr/>
+          <p:nvPr/>
+        </p:nvSpPr>
+        <p:spPr>
+          <a:xfrm>
+            <a:off x="9326880" y="2724912"/>
+            <a:ext cx="731520" cy="237744"/>
           </a:xfrm>
           <a:prstGeom prst="rect">
             <a:avLst/>
@@ -6718,14 +6970,14 @@
       </p:sp>
       <p:sp>
         <p:nvSpPr>
-          <p:cNvPr id="77" name="Text 75"/>
-          <p:cNvSpPr/>
-          <p:nvPr/>
-        </p:nvSpPr>
-        <p:spPr>
-          <a:xfrm>
-            <a:off x="8961120" y="2724912"/>
-            <a:ext cx="853440" cy="237744"/>
+          <p:cNvPr id="79" name="Text 77"/>
+          <p:cNvSpPr/>
+          <p:nvPr/>
+        </p:nvSpPr>
+        <p:spPr>
+          <a:xfrm>
+            <a:off x="9326880" y="2724912"/>
+            <a:ext cx="731520" cy="237744"/>
           </a:xfrm>
           <a:prstGeom prst="rect">
             <a:avLst/>
@@ -6757,14 +7009,14 @@
       </p:sp>
       <p:sp>
         <p:nvSpPr>
-          <p:cNvPr id="78" name="Text 76"/>
-          <p:cNvSpPr/>
-          <p:nvPr/>
-        </p:nvSpPr>
-        <p:spPr>
-          <a:xfrm>
-            <a:off x="9814560" y="2724912"/>
-            <a:ext cx="853440" cy="237744"/>
+          <p:cNvPr id="80" name="Text 78"/>
+          <p:cNvSpPr/>
+          <p:nvPr/>
+        </p:nvSpPr>
+        <p:spPr>
+          <a:xfrm>
+            <a:off x="10058400" y="2724912"/>
+            <a:ext cx="731520" cy="237744"/>
           </a:xfrm>
           <a:prstGeom prst="rect">
             <a:avLst/>
@@ -6796,14 +7048,14 @@
       </p:sp>
       <p:sp>
         <p:nvSpPr>
-          <p:cNvPr id="79" name="Text 77"/>
-          <p:cNvSpPr/>
-          <p:nvPr/>
-        </p:nvSpPr>
-        <p:spPr>
-          <a:xfrm>
-            <a:off x="10668000" y="2724912"/>
-            <a:ext cx="853440" cy="237744"/>
+          <p:cNvPr id="81" name="Text 79"/>
+          <p:cNvSpPr/>
+          <p:nvPr/>
+        </p:nvSpPr>
+        <p:spPr>
+          <a:xfrm>
+            <a:off x="10789920" y="2724912"/>
+            <a:ext cx="731520" cy="237744"/>
           </a:xfrm>
           <a:prstGeom prst="rect">
             <a:avLst/>
@@ -6835,7 +7087,7 @@
       </p:sp>
       <p:sp>
         <p:nvSpPr>
-          <p:cNvPr id="80" name="Text 78"/>
+          <p:cNvPr id="82" name="Text 80"/>
           <p:cNvSpPr/>
           <p:nvPr/>
         </p:nvSpPr>
@@ -6866,7 +7118,7 @@
                 <a:ea typeface="Segoe UI" pitchFamily="34" charset="-122"/>
                 <a:cs typeface="Segoe UI" pitchFamily="34" charset="-120"/>
               </a:rPr>
-              <a:t>Tab #4  —  Alerts Feed</a:t>
+              <a:t>Tab #5  —  Alerts Feed</a:t>
             </a:r>
             <a:endParaRPr lang="en-US" sz="1000" dirty="0"/>
           </a:p>
@@ -6874,7 +7126,7 @@
       </p:sp>
       <p:sp>
         <p:nvSpPr>
-          <p:cNvPr id="81" name="Shape 79"/>
+          <p:cNvPr id="83" name="Shape 81"/>
           <p:cNvSpPr/>
           <p:nvPr/>
         </p:nvSpPr>
@@ -6899,7 +7151,7 @@
       </p:sp>
       <p:sp>
         <p:nvSpPr>
-          <p:cNvPr id="82" name="Shape 80"/>
+          <p:cNvPr id="84" name="Shape 82"/>
           <p:cNvSpPr/>
           <p:nvPr/>
         </p:nvSpPr>
@@ -6924,7 +7176,7 @@
       </p:sp>
       <p:sp>
         <p:nvSpPr>
-          <p:cNvPr id="83" name="Text 81"/>
+          <p:cNvPr id="85" name="Text 83"/>
           <p:cNvSpPr/>
           <p:nvPr/>
         </p:nvSpPr>
@@ -6963,7 +7215,7 @@
       </p:sp>
       <p:sp>
         <p:nvSpPr>
-          <p:cNvPr id="84" name="Shape 82"/>
+          <p:cNvPr id="86" name="Shape 84"/>
           <p:cNvSpPr/>
           <p:nvPr/>
         </p:nvSpPr>
@@ -6988,7 +7240,7 @@
       </p:sp>
       <p:sp>
         <p:nvSpPr>
-          <p:cNvPr id="85" name="Text 83"/>
+          <p:cNvPr id="87" name="Text 85"/>
           <p:cNvSpPr/>
           <p:nvPr/>
         </p:nvSpPr>
@@ -7027,7 +7279,7 @@
       </p:sp>
       <p:sp>
         <p:nvSpPr>
-          <p:cNvPr id="86" name="Text 84"/>
+          <p:cNvPr id="88" name="Text 86"/>
           <p:cNvSpPr/>
           <p:nvPr/>
         </p:nvSpPr>
@@ -7066,7 +7318,7 @@
       </p:sp>
       <p:sp>
         <p:nvSpPr>
-          <p:cNvPr id="87" name="Text 85"/>
+          <p:cNvPr id="89" name="Text 87"/>
           <p:cNvSpPr/>
           <p:nvPr/>
         </p:nvSpPr>
@@ -7105,7 +7357,7 @@
       </p:sp>
       <p:sp>
         <p:nvSpPr>
-          <p:cNvPr id="88" name="Text 86"/>
+          <p:cNvPr id="90" name="Text 88"/>
           <p:cNvSpPr/>
           <p:nvPr/>
         </p:nvSpPr>
@@ -7144,7 +7396,7 @@
       </p:sp>
       <p:sp>
         <p:nvSpPr>
-          <p:cNvPr id="89" name="Shape 87"/>
+          <p:cNvPr id="91" name="Shape 89"/>
           <p:cNvSpPr/>
           <p:nvPr/>
         </p:nvSpPr>
@@ -7169,7 +7421,7 @@
       </p:sp>
       <p:sp>
         <p:nvSpPr>
-          <p:cNvPr id="90" name="Shape 88"/>
+          <p:cNvPr id="92" name="Shape 90"/>
           <p:cNvSpPr/>
           <p:nvPr/>
         </p:nvSpPr>
@@ -7194,7 +7446,7 @@
       </p:sp>
       <p:sp>
         <p:nvSpPr>
-          <p:cNvPr id="91" name="Text 89"/>
+          <p:cNvPr id="93" name="Text 91"/>
           <p:cNvSpPr/>
           <p:nvPr/>
         </p:nvSpPr>
@@ -7233,7 +7485,7 @@
       </p:sp>
       <p:sp>
         <p:nvSpPr>
-          <p:cNvPr id="92" name="Shape 90"/>
+          <p:cNvPr id="94" name="Shape 92"/>
           <p:cNvSpPr/>
           <p:nvPr/>
         </p:nvSpPr>
@@ -7258,7 +7510,7 @@
       </p:sp>
       <p:sp>
         <p:nvSpPr>
-          <p:cNvPr id="93" name="Text 91"/>
+          <p:cNvPr id="95" name="Text 93"/>
           <p:cNvSpPr/>
           <p:nvPr/>
         </p:nvSpPr>
@@ -7297,7 +7549,7 @@
       </p:sp>
       <p:sp>
         <p:nvSpPr>
-          <p:cNvPr id="94" name="Text 92"/>
+          <p:cNvPr id="96" name="Text 94"/>
           <p:cNvSpPr/>
           <p:nvPr/>
         </p:nvSpPr>
@@ -7336,7 +7588,7 @@
       </p:sp>
       <p:sp>
         <p:nvSpPr>
-          <p:cNvPr id="95" name="Text 93"/>
+          <p:cNvPr id="97" name="Text 95"/>
           <p:cNvSpPr/>
           <p:nvPr/>
         </p:nvSpPr>
@@ -7375,7 +7627,7 @@
       </p:sp>
       <p:sp>
         <p:nvSpPr>
-          <p:cNvPr id="96" name="Text 94"/>
+          <p:cNvPr id="98" name="Text 96"/>
           <p:cNvSpPr/>
           <p:nvPr/>
         </p:nvSpPr>
@@ -7414,7 +7666,7 @@
       </p:sp>
       <p:sp>
         <p:nvSpPr>
-          <p:cNvPr id="97" name="Shape 95"/>
+          <p:cNvPr id="99" name="Shape 97"/>
           <p:cNvSpPr/>
           <p:nvPr/>
         </p:nvSpPr>
@@ -7439,7 +7691,7 @@
       </p:sp>
       <p:sp>
         <p:nvSpPr>
-          <p:cNvPr id="98" name="Shape 96"/>
+          <p:cNvPr id="100" name="Shape 98"/>
           <p:cNvSpPr/>
           <p:nvPr/>
         </p:nvSpPr>
@@ -7464,7 +7716,7 @@
       </p:sp>
       <p:sp>
         <p:nvSpPr>
-          <p:cNvPr id="99" name="Text 97"/>
+          <p:cNvPr id="101" name="Text 99"/>
           <p:cNvSpPr/>
           <p:nvPr/>
         </p:nvSpPr>
@@ -7503,7 +7755,7 @@
       </p:sp>
       <p:sp>
         <p:nvSpPr>
-          <p:cNvPr id="100" name="Shape 98"/>
+          <p:cNvPr id="102" name="Shape 100"/>
           <p:cNvSpPr/>
           <p:nvPr/>
         </p:nvSpPr>
@@ -7528,7 +7780,7 @@
       </p:sp>
       <p:sp>
         <p:nvSpPr>
-          <p:cNvPr id="101" name="Text 99"/>
+          <p:cNvPr id="103" name="Text 101"/>
           <p:cNvSpPr/>
           <p:nvPr/>
         </p:nvSpPr>
@@ -7567,7 +7819,7 @@
       </p:sp>
       <p:sp>
         <p:nvSpPr>
-          <p:cNvPr id="102" name="Text 100"/>
+          <p:cNvPr id="104" name="Text 102"/>
           <p:cNvSpPr/>
           <p:nvPr/>
         </p:nvSpPr>
@@ -7606,7 +7858,7 @@
       </p:sp>
       <p:sp>
         <p:nvSpPr>
-          <p:cNvPr id="103" name="Text 101"/>
+          <p:cNvPr id="105" name="Text 103"/>
           <p:cNvSpPr/>
           <p:nvPr/>
         </p:nvSpPr>
@@ -7645,7 +7897,7 @@
       </p:sp>
       <p:sp>
         <p:nvSpPr>
-          <p:cNvPr id="104" name="Text 102"/>
+          <p:cNvPr id="106" name="Text 104"/>
           <p:cNvSpPr/>
           <p:nvPr/>
         </p:nvSpPr>
@@ -7684,7 +7936,7 @@
       </p:sp>
       <p:sp>
         <p:nvSpPr>
-          <p:cNvPr id="105" name="Shape 103"/>
+          <p:cNvPr id="107" name="Shape 105"/>
           <p:cNvSpPr/>
           <p:nvPr/>
         </p:nvSpPr>
@@ -7709,7 +7961,7 @@
       </p:sp>
       <p:sp>
         <p:nvSpPr>
-          <p:cNvPr id="106" name="Shape 104"/>
+          <p:cNvPr id="108" name="Shape 106"/>
           <p:cNvSpPr/>
           <p:nvPr/>
         </p:nvSpPr>
@@ -7734,7 +7986,7 @@
       </p:sp>
       <p:sp>
         <p:nvSpPr>
-          <p:cNvPr id="107" name="Text 105"/>
+          <p:cNvPr id="109" name="Text 107"/>
           <p:cNvSpPr/>
           <p:nvPr/>
         </p:nvSpPr>
@@ -7773,7 +8025,7 @@
       </p:sp>
       <p:sp>
         <p:nvSpPr>
-          <p:cNvPr id="108" name="Shape 106"/>
+          <p:cNvPr id="110" name="Shape 108"/>
           <p:cNvSpPr/>
           <p:nvPr/>
         </p:nvSpPr>
@@ -7798,7 +8050,7 @@
       </p:sp>
       <p:sp>
         <p:nvSpPr>
-          <p:cNvPr id="109" name="Text 107"/>
+          <p:cNvPr id="111" name="Text 109"/>
           <p:cNvSpPr/>
           <p:nvPr/>
         </p:nvSpPr>
@@ -7837,7 +8089,7 @@
       </p:sp>
       <p:sp>
         <p:nvSpPr>
-          <p:cNvPr id="110" name="Text 108"/>
+          <p:cNvPr id="112" name="Text 110"/>
           <p:cNvSpPr/>
           <p:nvPr/>
         </p:nvSpPr>
@@ -7876,7 +8128,7 @@
       </p:sp>
       <p:sp>
         <p:nvSpPr>
-          <p:cNvPr id="111" name="Text 109"/>
+          <p:cNvPr id="113" name="Text 111"/>
           <p:cNvSpPr/>
           <p:nvPr/>
         </p:nvSpPr>
@@ -7915,7 +8167,7 @@
       </p:sp>
       <p:sp>
         <p:nvSpPr>
-          <p:cNvPr id="112" name="Text 110"/>
+          <p:cNvPr id="114" name="Text 112"/>
           <p:cNvSpPr/>
           <p:nvPr/>
         </p:nvSpPr>
@@ -7954,7 +8206,7 @@
       </p:sp>
       <p:sp>
         <p:nvSpPr>
-          <p:cNvPr id="113" name="Shape 111"/>
+          <p:cNvPr id="115" name="Shape 113"/>
           <p:cNvSpPr/>
           <p:nvPr/>
         </p:nvSpPr>
@@ -7979,7 +8231,7 @@
       </p:sp>
       <p:sp>
         <p:nvSpPr>
-          <p:cNvPr id="114" name="Text 112"/>
+          <p:cNvPr id="116" name="Text 114"/>
           <p:cNvSpPr/>
           <p:nvPr/>
         </p:nvSpPr>
@@ -8018,7 +8270,7 @@
       </p:sp>
       <p:sp>
         <p:nvSpPr>
-          <p:cNvPr id="115" name="Text 113"/>
+          <p:cNvPr id="117" name="Text 115"/>
           <p:cNvSpPr/>
           <p:nvPr/>
         </p:nvSpPr>
@@ -8262,7 +8514,7 @@
                 <a:ea typeface="Segoe UI" pitchFamily="34" charset="-122"/>
                 <a:cs typeface="Segoe UI" pitchFamily="34" charset="-120"/>
               </a:rPr>
-              <a:t>Tab #5  —  Scenario Lab</a:t>
+              <a:t>Tab #6  —  Scenario Lab</a:t>
             </a:r>
             <a:endParaRPr lang="en-US" sz="1000" dirty="0"/>
           </a:p>
@@ -9480,7 +9732,7 @@
                 <a:ea typeface="Segoe UI" pitchFamily="34" charset="-122"/>
                 <a:cs typeface="Segoe UI" pitchFamily="34" charset="-120"/>
               </a:rPr>
-              <a:t>Tab #6  —  Quality Metrics</a:t>
+              <a:t>Tab #7  —  Quality Metrics</a:t>
             </a:r>
             <a:endParaRPr lang="en-US" sz="1000" dirty="0"/>
           </a:p>
@@ -13165,7 +13417,7 @@
                 <a:ea typeface="Segoe UI" pitchFamily="34" charset="-122"/>
                 <a:cs typeface="Segoe UI" pitchFamily="34" charset="-120"/>
               </a:rPr>
-              <a:t>Enterprise-style 6-tab operations console</a:t>
+              <a:t>Enterprise-style 7-tab operations console</a:t>
             </a:r>
             <a:endParaRPr lang="en-US" sz="1100" dirty="0"/>
           </a:p>
@@ -17439,7 +17691,7 @@
                 <a:ea typeface="Segoe UI" pitchFamily="34" charset="-122"/>
                 <a:cs typeface="Segoe UI" pitchFamily="34" charset="-120"/>
               </a:rPr>
-              <a:t>Streamlit console — 6-tab operations view with scenario injection</a:t>
+              <a:t>Streamlit console — 7-tab operations view with scenario injection</a:t>
             </a:r>
             <a:endParaRPr lang="en-US" sz="1000" dirty="0"/>
           </a:p>
@@ -27455,7 +27707,7 @@
                 <a:ea typeface="Segoe UI" pitchFamily="34" charset="-122"/>
                 <a:cs typeface="Segoe UI" pitchFamily="34" charset="-120"/>
               </a:rPr>
-              <a:t>Estimates σ robustly via MAD (median absolute deviation). Flags when |z| &gt; 2.5.</a:t>
+              <a:t>Estimates σ robustly via MAD (median absolute deviation). Flags when |z| &gt; 3.2.</a:t>
             </a:r>
             <a:endParaRPr lang="en-US" sz="1050" dirty="0"/>
           </a:p>
@@ -28183,7 +28435,7 @@
                 <a:ea typeface="Segoe UI" pitchFamily="34" charset="-122"/>
                 <a:cs typeface="Segoe UI" pitchFamily="34" charset="-120"/>
               </a:rPr>
-              <a:t>scikit-learn IsolationForest, contamination=0.05. Flags abnormal multi-sensor patterns.</a:t>
+              <a:t>scikit-learn IsolationForest, contamination=0.02. Flags abnormal multi-sensor patterns.</a:t>
             </a:r>
             <a:endParaRPr lang="en-US" sz="1050" dirty="0"/>
           </a:p>
